--- a/test/generator/baseline/gen.pptx.to.pptx.pptx
+++ b/test/generator/baseline/gen.pptx.to.pptx.pptx
@@ -287,9 +287,12 @@
           </a:p>
           <a:p>
             <a:pPr marL="228600" indent="-177800">
-              <a:buFont typeface="+mj-lt"/>
-              <a:buAutoNum type="arabicPeriod"/>
+              <a:buNone/>
             </a:pPr>
+            <a:r>
+              <a:rPr lang="en-US" dirty="0"/>
+              <a:t>1.	</a:t>
+            </a:r>
             <a:r>
               <a:rPr lang="en-US" dirty="0"/>
               <a:t>Sun</a:t>
@@ -298,9 +301,12 @@
           </a:p>
           <a:p>
             <a:pPr marL="228600" indent="-177800">
-              <a:buFont typeface="+mj-lt"/>
-              <a:buAutoNum type="arabicPeriod"/>
+              <a:buNone/>
             </a:pPr>
+            <a:r>
+              <a:rPr lang="en-US" dirty="0"/>
+              <a:t>2.	</a:t>
+            </a:r>
             <a:r>
               <a:rPr lang="en-US" dirty="0"/>
               <a:t>Mon</a:t>
@@ -13560,7 +13566,7 @@
       </p:sp>
       <p:pic>
         <p:nvPicPr>
-          <p:cNvPr id="4" name="Picture 4"/>
+          <p:cNvPr id="4" name="Picture 4" descr="165 Inspirational Quotes To Keep You Motivated In Life"/>
           <p:cNvPicPr>
             <a:picLocks noChangeAspect="1"/>
           </p:cNvPicPr>
@@ -13818,9 +13824,17 @@
           </a:p>
           <a:p>
             <a:pPr marL="228600" indent="-177800">
-              <a:buFont typeface="+mj-lt"/>
-              <a:buAutoNum type="arabicPeriod"/>
+              <a:buNone/>
             </a:pPr>
+            <a:r>
+              <a:rPr lang="en-US" sz="1200" dirty="0">
+                <a:solidFill>
+                  <a:srgbClr val="000000"/>
+                </a:solidFill>
+                <a:latin typeface="Ubuntu"/>
+              </a:rPr>
+              <a:t>1.	</a:t>
+            </a:r>
             <a:r>
               <a:rPr lang="en-US" sz="1200" dirty="0">
                 <a:solidFill>
@@ -13834,9 +13848,17 @@
           </a:p>
           <a:p>
             <a:pPr marL="228600" indent="-177800">
-              <a:buFont typeface="+mj-lt"/>
-              <a:buAutoNum type="arabicPeriod"/>
+              <a:buNone/>
             </a:pPr>
+            <a:r>
+              <a:rPr lang="en-US" sz="1200" dirty="0">
+                <a:solidFill>
+                  <a:srgbClr val="000000"/>
+                </a:solidFill>
+                <a:latin typeface="Ubuntu"/>
+              </a:rPr>
+              <a:t>2.	</a:t>
+            </a:r>
             <a:r>
               <a:rPr lang="en-US" sz="1200" dirty="0">
                 <a:solidFill>
@@ -13891,9 +13913,17 @@
           </a:p>
           <a:p>
             <a:pPr marL="228600" indent="-177800">
-              <a:buFont typeface="+mj-lt"/>
-              <a:buAutoNum type="arabicPeriod"/>
+              <a:buNone/>
             </a:pPr>
+            <a:r>
+              <a:rPr lang="en-US" sz="1200" dirty="0">
+                <a:solidFill>
+                  <a:srgbClr val="000000"/>
+                </a:solidFill>
+                <a:latin typeface="Ubuntu"/>
+              </a:rPr>
+              <a:t>1.	</a:t>
+            </a:r>
             <a:r>
               <a:rPr lang="en-US" sz="1200" dirty="0">
                 <a:solidFill>
@@ -13907,9 +13937,17 @@
           </a:p>
           <a:p>
             <a:pPr marL="457200" indent="-177800" lvl="1">
-              <a:buFont typeface="+mj-lt"/>
-              <a:buAutoNum type="arabicPeriod"/>
+              <a:buNone/>
             </a:pPr>
+            <a:r>
+              <a:rPr lang="en-US" sz="1200" dirty="0">
+                <a:solidFill>
+                  <a:srgbClr val="000000"/>
+                </a:solidFill>
+                <a:latin typeface="Ubuntu"/>
+              </a:rPr>
+              <a:t>1.	</a:t>
+            </a:r>
             <a:r>
               <a:rPr lang="en-US" sz="1200" dirty="0">
                 <a:solidFill>
@@ -13923,9 +13961,17 @@
           </a:p>
           <a:p>
             <a:pPr marL="685800" indent="-177800" lvl="2">
-              <a:buFont typeface="+mj-lt"/>
-              <a:buAutoNum type="arabicPeriod"/>
+              <a:buNone/>
             </a:pPr>
+            <a:r>
+              <a:rPr lang="en-US" sz="1200" dirty="0">
+                <a:solidFill>
+                  <a:srgbClr val="000000"/>
+                </a:solidFill>
+                <a:latin typeface="Ubuntu"/>
+              </a:rPr>
+              <a:t>1.	</a:t>
+            </a:r>
             <a:r>
               <a:rPr lang="en-US" sz="1200" dirty="0">
                 <a:solidFill>
@@ -13939,9 +13985,17 @@
           </a:p>
           <a:p>
             <a:pPr marL="685800" indent="-177800" lvl="2">
-              <a:buFont typeface="+mj-lt"/>
-              <a:buAutoNum type="arabicPeriod"/>
+              <a:buNone/>
             </a:pPr>
+            <a:r>
+              <a:rPr lang="en-US" sz="1200" dirty="0">
+                <a:solidFill>
+                  <a:srgbClr val="000000"/>
+                </a:solidFill>
+                <a:latin typeface="Ubuntu"/>
+              </a:rPr>
+              <a:t>2.	</a:t>
+            </a:r>
             <a:r>
               <a:rPr lang="en-US" sz="1200" dirty="0">
                 <a:solidFill>
@@ -13955,9 +14009,17 @@
           </a:p>
           <a:p>
             <a:pPr marL="685800" indent="-177800" lvl="2">
-              <a:buFont typeface="+mj-lt"/>
-              <a:buAutoNum type="arabicPeriod"/>
+              <a:buNone/>
             </a:pPr>
+            <a:r>
+              <a:rPr lang="en-US" sz="1200" dirty="0">
+                <a:solidFill>
+                  <a:srgbClr val="000000"/>
+                </a:solidFill>
+                <a:latin typeface="Ubuntu"/>
+              </a:rPr>
+              <a:t>3.	</a:t>
+            </a:r>
             <a:r>
               <a:rPr lang="en-US" sz="1200" dirty="0">
                 <a:solidFill>
@@ -13971,9 +14033,17 @@
           </a:p>
           <a:p>
             <a:pPr marL="228600" indent="-177800">
-              <a:buFont typeface="+mj-lt"/>
-              <a:buAutoNum type="arabicPeriod"/>
+              <a:buNone/>
             </a:pPr>
+            <a:r>
+              <a:rPr lang="en-US" sz="1200" dirty="0">
+                <a:solidFill>
+                  <a:srgbClr val="000000"/>
+                </a:solidFill>
+                <a:latin typeface="Ubuntu"/>
+              </a:rPr>
+              <a:t>2.	</a:t>
+            </a:r>
             <a:r>
               <a:rPr lang="en-US" sz="1200" dirty="0">
                 <a:solidFill>
@@ -14149,9 +14219,17 @@
           </a:p>
           <a:p>
             <a:pPr marL="228600" indent="-177800">
-              <a:buFont typeface="+mj-lt"/>
-              <a:buAutoNum type="arabicPeriod"/>
+              <a:buNone/>
             </a:pPr>
+            <a:r>
+              <a:rPr lang="en-US" sz="1200" dirty="0">
+                <a:solidFill>
+                  <a:srgbClr val="000000"/>
+                </a:solidFill>
+                <a:latin typeface="Ubuntu"/>
+              </a:rPr>
+              <a:t>1.	</a:t>
+            </a:r>
             <a:r>
               <a:rPr lang="en-US" sz="1200" dirty="0">
                 <a:solidFill>
@@ -14165,9 +14243,17 @@
           </a:p>
           <a:p>
             <a:pPr marL="228600" indent="-177800">
-              <a:buFont typeface="+mj-lt"/>
-              <a:buAutoNum type="arabicPeriod"/>
+              <a:buNone/>
             </a:pPr>
+            <a:r>
+              <a:rPr lang="en-US" sz="1200" dirty="0">
+                <a:solidFill>
+                  <a:srgbClr val="000000"/>
+                </a:solidFill>
+                <a:latin typeface="Ubuntu"/>
+              </a:rPr>
+              <a:t>2.	</a:t>
+            </a:r>
             <a:r>
               <a:rPr lang="en-US" sz="1200" dirty="0">
                 <a:solidFill>
@@ -14196,9 +14282,17 @@
           </a:p>
           <a:p>
             <a:pPr marL="228600" indent="-177800">
-              <a:buFont typeface="+mj-lt"/>
-              <a:buAutoNum type="arabicPeriod"/>
+              <a:buNone/>
             </a:pPr>
+            <a:r>
+              <a:rPr lang="en-US" sz="1200" dirty="0">
+                <a:solidFill>
+                  <a:srgbClr val="000000"/>
+                </a:solidFill>
+                <a:latin typeface="Ubuntu"/>
+              </a:rPr>
+              <a:t>3.	</a:t>
+            </a:r>
             <a:r>
               <a:rPr lang="en-US" sz="1200" dirty="0">
                 <a:solidFill>
@@ -14212,9 +14306,17 @@
           </a:p>
           <a:p>
             <a:pPr marL="228600" indent="-177800">
-              <a:buFont typeface="+mj-lt"/>
-              <a:buAutoNum type="arabicPeriod"/>
+              <a:buNone/>
             </a:pPr>
+            <a:r>
+              <a:rPr lang="en-US" sz="1200" dirty="0">
+                <a:solidFill>
+                  <a:srgbClr val="000000"/>
+                </a:solidFill>
+                <a:latin typeface="Ubuntu"/>
+              </a:rPr>
+              <a:t>4.	</a:t>
+            </a:r>
             <a:r>
               <a:rPr lang="en-US" sz="1200" dirty="0">
                 <a:solidFill>

--- a/test/generator/baseline/gen.pptx.to.pptx.pptx
+++ b/test/generator/baseline/gen.pptx.to.pptx.pptx
@@ -13580,8 +13580,8 @@
         </p:blipFill>
         <p:spPr>
           <a:xfrm>
-            <a:off x="4059428" y="1323086"/>
-            <a:ext cx="3574542" cy="3574542"/>
+            <a:off x="4059428" y="1307592"/>
+            <a:ext cx="3574542" cy="3605530"/>
           </a:xfrm>
           <a:prstGeom prst="rect">
             <a:avLst/>

--- a/test/generator/baseline/gen.pptx.to.pptx.pptx
+++ b/test/generator/baseline/gen.pptx.to.pptx.pptx
@@ -13433,6 +13433,7 @@
                   <a:srgbClr val="000000"/>
                 </a:solidFill>
                 <a:latin typeface="Ubuntu"/>
+                <a:hlinkClick r:id="rId3"/>
               </a:rPr>
               <a:t>paragraph level formatting</a:t>
             </a:r>

--- a/test/generator/baseline/gen.pptx.to.pptx.pptx
+++ b/test/generator/baseline/gen.pptx.to.pptx.pptx
@@ -14426,7 +14426,134 @@
                 <a:gridCol w="2493818"/>
                 <a:gridCol w="1108364"/>
               </a:tblGrid>
-              <a:tr h="829310">
+              <a:tr h="691092">
+                <a:tc gridSpan="4">
+                  <a:txBody>
+                    <a:bodyPr/>
+                    <a:lstStyle/>
+                    <a:p>
+                      <a:pPr>
+                        <a:buNone/>
+                      </a:pPr>
+                      <a:r>
+                        <a:rPr lang="en-US" sz="1200" b="1" dirty="0"/>
+                        <a:t>Chart Title</a:t>
+                      </a:r>
+                      <a:endParaRPr lang="en-US" sz="1200" dirty="0"/>
+                    </a:p>
+                  </a:txBody>
+                  <a:tcPr>
+                    <a:lnL w="9525">
+                      <a:solidFill>
+                        <a:srgbClr val="BFBFBF"/>
+                      </a:solidFill>
+                    </a:lnL>
+                    <a:lnR w="9525">
+                      <a:solidFill>
+                        <a:srgbClr val="BFBFBF"/>
+                      </a:solidFill>
+                    </a:lnR>
+                    <a:lnT w="9525">
+                      <a:solidFill>
+                        <a:srgbClr val="BFBFBF"/>
+                      </a:solidFill>
+                    </a:lnT>
+                    <a:lnB w="9525">
+                      <a:solidFill>
+                        <a:srgbClr val="BFBFBF"/>
+                      </a:solidFill>
+                    </a:lnB>
+                  </a:tcPr>
+                </a:tc>
+                <a:tc hMerge="1">
+                  <a:txBody>
+                    <a:bodyPr/>
+                    <a:lstStyle/>
+                    <a:p/>
+                  </a:txBody>
+                  <a:tcPr>
+                    <a:lnL w="9525">
+                      <a:solidFill>
+                        <a:srgbClr val="BFBFBF"/>
+                      </a:solidFill>
+                    </a:lnL>
+                    <a:lnR w="9525">
+                      <a:solidFill>
+                        <a:srgbClr val="BFBFBF"/>
+                      </a:solidFill>
+                    </a:lnR>
+                    <a:lnT w="9525">
+                      <a:solidFill>
+                        <a:srgbClr val="BFBFBF"/>
+                      </a:solidFill>
+                    </a:lnT>
+                    <a:lnB w="9525">
+                      <a:solidFill>
+                        <a:srgbClr val="BFBFBF"/>
+                      </a:solidFill>
+                    </a:lnB>
+                  </a:tcPr>
+                </a:tc>
+                <a:tc hMerge="1">
+                  <a:txBody>
+                    <a:bodyPr/>
+                    <a:lstStyle/>
+                    <a:p/>
+                  </a:txBody>
+                  <a:tcPr>
+                    <a:lnL w="9525">
+                      <a:solidFill>
+                        <a:srgbClr val="BFBFBF"/>
+                      </a:solidFill>
+                    </a:lnL>
+                    <a:lnR w="9525">
+                      <a:solidFill>
+                        <a:srgbClr val="BFBFBF"/>
+                      </a:solidFill>
+                    </a:lnR>
+                    <a:lnT w="9525">
+                      <a:solidFill>
+                        <a:srgbClr val="BFBFBF"/>
+                      </a:solidFill>
+                    </a:lnT>
+                    <a:lnB w="9525">
+                      <a:solidFill>
+                        <a:srgbClr val="BFBFBF"/>
+                      </a:solidFill>
+                    </a:lnB>
+                  </a:tcPr>
+                </a:tc>
+                <a:tc hMerge="1">
+                  <a:txBody>
+                    <a:bodyPr/>
+                    <a:lstStyle/>
+                    <a:p/>
+                  </a:txBody>
+                  <a:tcPr>
+                    <a:lnL w="9525">
+                      <a:solidFill>
+                        <a:srgbClr val="BFBFBF"/>
+                      </a:solidFill>
+                    </a:lnL>
+                    <a:lnR w="9525">
+                      <a:solidFill>
+                        <a:srgbClr val="BFBFBF"/>
+                      </a:solidFill>
+                    </a:lnR>
+                    <a:lnT w="9525">
+                      <a:solidFill>
+                        <a:srgbClr val="BFBFBF"/>
+                      </a:solidFill>
+                    </a:lnT>
+                    <a:lnB w="9525">
+                      <a:solidFill>
+                        <a:srgbClr val="BFBFBF"/>
+                      </a:solidFill>
+                    </a:lnB>
+                  </a:tcPr>
+                </a:tc>
+              </a:tr>
+              <a:tr h="691092">
                 <a:tc>
                   <a:txBody>
                     <a:bodyPr/>
@@ -14576,7 +14703,7 @@
                   </a:tcPr>
                 </a:tc>
               </a:tr>
-              <a:tr h="829310">
+              <a:tr h="691092">
                 <a:tc>
                   <a:txBody>
                     <a:bodyPr/>
@@ -14730,7 +14857,7 @@
                   </a:tcPr>
                 </a:tc>
               </a:tr>
-              <a:tr h="829310">
+              <a:tr h="691092">
                 <a:tc>
                   <a:txBody>
                     <a:bodyPr/>
@@ -14884,7 +15011,7 @@
                   </a:tcPr>
                 </a:tc>
               </a:tr>
-              <a:tr h="829310">
+              <a:tr h="691092">
                 <a:tc>
                   <a:txBody>
                     <a:bodyPr/>
@@ -15038,7 +15165,7 @@
                   </a:tcPr>
                 </a:tc>
               </a:tr>
-              <a:tr h="829310">
+              <a:tr h="691092">
                 <a:tc>
                   <a:txBody>
                     <a:bodyPr/>
